--- a/final_project_presentation.pptx
+++ b/final_project_presentation.pptx
@@ -5,15 +5,15 @@
     <p:sldMasterId id="2147483648" r:id="rId1"/>
   </p:sldMasterIdLst>
   <p:sldIdLst>
-    <p:sldId id="256" r:id="rId7"/>
-    <p:sldId id="257" r:id="rId8"/>
-    <p:sldId id="258" r:id="rId9"/>
-    <p:sldId id="259" r:id="rId10"/>
-    <p:sldId id="260" r:id="rId11"/>
-    <p:sldId id="261" r:id="rId12"/>
-    <p:sldId id="262" r:id="rId13"/>
+    <p:sldId id="256" r:id="rId2"/>
+    <p:sldId id="257" r:id="rId3"/>
+    <p:sldId id="258" r:id="rId4"/>
+    <p:sldId id="259" r:id="rId5"/>
+    <p:sldId id="260" r:id="rId6"/>
+    <p:sldId id="261" r:id="rId7"/>
+    <p:sldId id="262" r:id="rId8"/>
   </p:sldIdLst>
-  <p:sldSz cx="12191695" cy="6858000" type="screen4x3"/>
+  <p:sldSz cx="12192000" cy="6858000"/>
   <p:notesSz cx="6858000" cy="9144000"/>
   <p:defaultTextStyle>
     <a:defPPr>
@@ -110,6 +110,22 @@
       </a:defRPr>
     </a:lvl9pPr>
   </p:defaultTextStyle>
+  <p:extLst>
+    <p:ext uri="{EFAFB233-063F-42B5-8137-9DF3F51BA10A}">
+      <p15:sldGuideLst xmlns:p15="http://schemas.microsoft.com/office/powerpoint/2012/main">
+        <p15:guide id="1" orient="horz" pos="2160">
+          <p15:clr>
+            <a:srgbClr val="A4A3A4"/>
+          </p15:clr>
+        </p15:guide>
+        <p15:guide id="2" pos="2880">
+          <p15:clr>
+            <a:srgbClr val="A4A3A4"/>
+          </p15:clr>
+        </p15:guide>
+      </p15:sldGuideLst>
+    </p:ext>
+  </p:extLst>
 </p:presentation>
 </file>
 
@@ -151,10 +167,9 @@
           <a:lstStyle/>
           <a:p>
             <a:r>
-              <a:rPr lang="en-US" smtClean="0"/>
+              <a:rPr lang="en-US"/>
               <a:t>Click to edit Master title style</a:t>
             </a:r>
-            <a:endParaRPr lang="en-US"/>
           </a:p>
         </p:txBody>
       </p:sp>
@@ -270,10 +285,9 @@
           </a:lstStyle>
           <a:p>
             <a:r>
-              <a:rPr lang="en-US" smtClean="0"/>
+              <a:rPr lang="en-US"/>
               <a:t>Click to edit Master subtitle style</a:t>
             </a:r>
-            <a:endParaRPr lang="en-US"/>
           </a:p>
         </p:txBody>
       </p:sp>
@@ -294,7 +308,7 @@
           <a:p>
             <a:fld id="{5BCAD085-E8A6-8845-BD4E-CB4CCA059FC4}" type="datetimeFigureOut">
               <a:rPr lang="en-US" smtClean="0"/>
-              <a:t>1/27/13</a:t>
+              <a:t>4/17/2026</a:t>
             </a:fld>
             <a:endParaRPr lang="en-US"/>
           </a:p>
@@ -388,10 +402,9 @@
           <a:lstStyle/>
           <a:p>
             <a:r>
-              <a:rPr lang="en-US" smtClean="0"/>
+              <a:rPr lang="en-US"/>
               <a:t>Click to edit Master title style</a:t>
             </a:r>
-            <a:endParaRPr lang="en-US"/>
           </a:p>
         </p:txBody>
       </p:sp>
@@ -412,38 +425,37 @@
           <a:p>
             <a:pPr lvl="0"/>
             <a:r>
-              <a:rPr lang="en-US" smtClean="0"/>
+              <a:rPr lang="en-US"/>
               <a:t>Click to edit Master text styles</a:t>
             </a:r>
           </a:p>
           <a:p>
             <a:pPr lvl="1"/>
             <a:r>
-              <a:rPr lang="en-US" smtClean="0"/>
+              <a:rPr lang="en-US"/>
               <a:t>Second level</a:t>
             </a:r>
           </a:p>
           <a:p>
             <a:pPr lvl="2"/>
             <a:r>
-              <a:rPr lang="en-US" smtClean="0"/>
+              <a:rPr lang="en-US"/>
               <a:t>Third level</a:t>
             </a:r>
           </a:p>
           <a:p>
             <a:pPr lvl="3"/>
             <a:r>
-              <a:rPr lang="en-US" smtClean="0"/>
+              <a:rPr lang="en-US"/>
               <a:t>Fourth level</a:t>
             </a:r>
           </a:p>
           <a:p>
             <a:pPr lvl="4"/>
             <a:r>
-              <a:rPr lang="en-US" smtClean="0"/>
+              <a:rPr lang="en-US"/>
               <a:t>Fifth level</a:t>
             </a:r>
-            <a:endParaRPr lang="en-US"/>
           </a:p>
         </p:txBody>
       </p:sp>
@@ -464,7 +476,7 @@
           <a:p>
             <a:fld id="{5BCAD085-E8A6-8845-BD4E-CB4CCA059FC4}" type="datetimeFigureOut">
               <a:rPr lang="en-US" smtClean="0"/>
-              <a:t>1/27/13</a:t>
+              <a:t>4/17/2026</a:t>
             </a:fld>
             <a:endParaRPr lang="en-US"/>
           </a:p>
@@ -563,10 +575,9 @@
           <a:lstStyle/>
           <a:p>
             <a:r>
-              <a:rPr lang="en-US" smtClean="0"/>
+              <a:rPr lang="en-US"/>
               <a:t>Click to edit Master title style</a:t>
             </a:r>
-            <a:endParaRPr lang="en-US"/>
           </a:p>
         </p:txBody>
       </p:sp>
@@ -592,38 +603,37 @@
           <a:p>
             <a:pPr lvl="0"/>
             <a:r>
-              <a:rPr lang="en-US" smtClean="0"/>
+              <a:rPr lang="en-US"/>
               <a:t>Click to edit Master text styles</a:t>
             </a:r>
           </a:p>
           <a:p>
             <a:pPr lvl="1"/>
             <a:r>
-              <a:rPr lang="en-US" smtClean="0"/>
+              <a:rPr lang="en-US"/>
               <a:t>Second level</a:t>
             </a:r>
           </a:p>
           <a:p>
             <a:pPr lvl="2"/>
             <a:r>
-              <a:rPr lang="en-US" smtClean="0"/>
+              <a:rPr lang="en-US"/>
               <a:t>Third level</a:t>
             </a:r>
           </a:p>
           <a:p>
             <a:pPr lvl="3"/>
             <a:r>
-              <a:rPr lang="en-US" smtClean="0"/>
+              <a:rPr lang="en-US"/>
               <a:t>Fourth level</a:t>
             </a:r>
           </a:p>
           <a:p>
             <a:pPr lvl="4"/>
             <a:r>
-              <a:rPr lang="en-US" smtClean="0"/>
+              <a:rPr lang="en-US"/>
               <a:t>Fifth level</a:t>
             </a:r>
-            <a:endParaRPr lang="en-US"/>
           </a:p>
         </p:txBody>
       </p:sp>
@@ -644,7 +654,7 @@
           <a:p>
             <a:fld id="{5BCAD085-E8A6-8845-BD4E-CB4CCA059FC4}" type="datetimeFigureOut">
               <a:rPr lang="en-US" smtClean="0"/>
-              <a:t>1/27/13</a:t>
+              <a:t>4/17/2026</a:t>
             </a:fld>
             <a:endParaRPr lang="en-US"/>
           </a:p>
@@ -738,10 +748,9 @@
           <a:lstStyle/>
           <a:p>
             <a:r>
-              <a:rPr lang="en-US" smtClean="0"/>
+              <a:rPr lang="en-US"/>
               <a:t>Click to edit Master title style</a:t>
             </a:r>
-            <a:endParaRPr lang="en-US"/>
           </a:p>
         </p:txBody>
       </p:sp>
@@ -762,38 +771,37 @@
           <a:p>
             <a:pPr lvl="0"/>
             <a:r>
-              <a:rPr lang="en-US" smtClean="0"/>
+              <a:rPr lang="en-US"/>
               <a:t>Click to edit Master text styles</a:t>
             </a:r>
           </a:p>
           <a:p>
             <a:pPr lvl="1"/>
             <a:r>
-              <a:rPr lang="en-US" smtClean="0"/>
+              <a:rPr lang="en-US"/>
               <a:t>Second level</a:t>
             </a:r>
           </a:p>
           <a:p>
             <a:pPr lvl="2"/>
             <a:r>
-              <a:rPr lang="en-US" smtClean="0"/>
+              <a:rPr lang="en-US"/>
               <a:t>Third level</a:t>
             </a:r>
           </a:p>
           <a:p>
             <a:pPr lvl="3"/>
             <a:r>
-              <a:rPr lang="en-US" smtClean="0"/>
+              <a:rPr lang="en-US"/>
               <a:t>Fourth level</a:t>
             </a:r>
           </a:p>
           <a:p>
             <a:pPr lvl="4"/>
             <a:r>
-              <a:rPr lang="en-US" smtClean="0"/>
+              <a:rPr lang="en-US"/>
               <a:t>Fifth level</a:t>
             </a:r>
-            <a:endParaRPr lang="en-US"/>
           </a:p>
         </p:txBody>
       </p:sp>
@@ -814,7 +822,7 @@
           <a:p>
             <a:fld id="{5BCAD085-E8A6-8845-BD4E-CB4CCA059FC4}" type="datetimeFigureOut">
               <a:rPr lang="en-US" smtClean="0"/>
-              <a:t>1/27/13</a:t>
+              <a:t>4/17/2026</a:t>
             </a:fld>
             <a:endParaRPr lang="en-US"/>
           </a:p>
@@ -917,10 +925,9 @@
           </a:lstStyle>
           <a:p>
             <a:r>
-              <a:rPr lang="en-US" smtClean="0"/>
+              <a:rPr lang="en-US"/>
               <a:t>Click to edit Master title style</a:t>
             </a:r>
-            <a:endParaRPr lang="en-US"/>
           </a:p>
         </p:txBody>
       </p:sp>
@@ -1037,7 +1044,7 @@
           <a:p>
             <a:pPr lvl="0"/>
             <a:r>
-              <a:rPr lang="en-US" smtClean="0"/>
+              <a:rPr lang="en-US"/>
               <a:t>Click to edit Master text styles</a:t>
             </a:r>
           </a:p>
@@ -1060,7 +1067,7 @@
           <a:p>
             <a:fld id="{5BCAD085-E8A6-8845-BD4E-CB4CCA059FC4}" type="datetimeFigureOut">
               <a:rPr lang="en-US" smtClean="0"/>
-              <a:t>1/27/13</a:t>
+              <a:t>4/17/2026</a:t>
             </a:fld>
             <a:endParaRPr lang="en-US"/>
           </a:p>
@@ -1154,10 +1161,9 @@
           <a:lstStyle/>
           <a:p>
             <a:r>
-              <a:rPr lang="en-US" smtClean="0"/>
+              <a:rPr lang="en-US"/>
               <a:t>Click to edit Master title style</a:t>
             </a:r>
-            <a:endParaRPr lang="en-US"/>
           </a:p>
         </p:txBody>
       </p:sp>
@@ -1211,38 +1217,37 @@
           <a:p>
             <a:pPr lvl="0"/>
             <a:r>
-              <a:rPr lang="en-US" smtClean="0"/>
+              <a:rPr lang="en-US"/>
               <a:t>Click to edit Master text styles</a:t>
             </a:r>
           </a:p>
           <a:p>
             <a:pPr lvl="1"/>
             <a:r>
-              <a:rPr lang="en-US" smtClean="0"/>
+              <a:rPr lang="en-US"/>
               <a:t>Second level</a:t>
             </a:r>
           </a:p>
           <a:p>
             <a:pPr lvl="2"/>
             <a:r>
-              <a:rPr lang="en-US" smtClean="0"/>
+              <a:rPr lang="en-US"/>
               <a:t>Third level</a:t>
             </a:r>
           </a:p>
           <a:p>
             <a:pPr lvl="3"/>
             <a:r>
-              <a:rPr lang="en-US" smtClean="0"/>
+              <a:rPr lang="en-US"/>
               <a:t>Fourth level</a:t>
             </a:r>
           </a:p>
           <a:p>
             <a:pPr lvl="4"/>
             <a:r>
-              <a:rPr lang="en-US" smtClean="0"/>
+              <a:rPr lang="en-US"/>
               <a:t>Fifth level</a:t>
             </a:r>
-            <a:endParaRPr lang="en-US"/>
           </a:p>
         </p:txBody>
       </p:sp>
@@ -1296,38 +1301,37 @@
           <a:p>
             <a:pPr lvl="0"/>
             <a:r>
-              <a:rPr lang="en-US" smtClean="0"/>
+              <a:rPr lang="en-US"/>
               <a:t>Click to edit Master text styles</a:t>
             </a:r>
           </a:p>
           <a:p>
             <a:pPr lvl="1"/>
             <a:r>
-              <a:rPr lang="en-US" smtClean="0"/>
+              <a:rPr lang="en-US"/>
               <a:t>Second level</a:t>
             </a:r>
           </a:p>
           <a:p>
             <a:pPr lvl="2"/>
             <a:r>
-              <a:rPr lang="en-US" smtClean="0"/>
+              <a:rPr lang="en-US"/>
               <a:t>Third level</a:t>
             </a:r>
           </a:p>
           <a:p>
             <a:pPr lvl="3"/>
             <a:r>
-              <a:rPr lang="en-US" smtClean="0"/>
+              <a:rPr lang="en-US"/>
               <a:t>Fourth level</a:t>
             </a:r>
           </a:p>
           <a:p>
             <a:pPr lvl="4"/>
             <a:r>
-              <a:rPr lang="en-US" smtClean="0"/>
+              <a:rPr lang="en-US"/>
               <a:t>Fifth level</a:t>
             </a:r>
-            <a:endParaRPr lang="en-US"/>
           </a:p>
         </p:txBody>
       </p:sp>
@@ -1348,7 +1352,7 @@
           <a:p>
             <a:fld id="{5BCAD085-E8A6-8845-BD4E-CB4CCA059FC4}" type="datetimeFigureOut">
               <a:rPr lang="en-US" smtClean="0"/>
-              <a:t>1/27/13</a:t>
+              <a:t>4/17/2026</a:t>
             </a:fld>
             <a:endParaRPr lang="en-US"/>
           </a:p>
@@ -1446,10 +1450,9 @@
           </a:lstStyle>
           <a:p>
             <a:r>
-              <a:rPr lang="en-US" smtClean="0"/>
+              <a:rPr lang="en-US"/>
               <a:t>Click to edit Master title style</a:t>
             </a:r>
-            <a:endParaRPr lang="en-US"/>
           </a:p>
         </p:txBody>
       </p:sp>
@@ -1512,7 +1515,7 @@
           <a:p>
             <a:pPr lvl="0"/>
             <a:r>
-              <a:rPr lang="en-US" smtClean="0"/>
+              <a:rPr lang="en-US"/>
               <a:t>Click to edit Master text styles</a:t>
             </a:r>
           </a:p>
@@ -1568,38 +1571,37 @@
           <a:p>
             <a:pPr lvl="0"/>
             <a:r>
-              <a:rPr lang="en-US" smtClean="0"/>
+              <a:rPr lang="en-US"/>
               <a:t>Click to edit Master text styles</a:t>
             </a:r>
           </a:p>
           <a:p>
             <a:pPr lvl="1"/>
             <a:r>
-              <a:rPr lang="en-US" smtClean="0"/>
+              <a:rPr lang="en-US"/>
               <a:t>Second level</a:t>
             </a:r>
           </a:p>
           <a:p>
             <a:pPr lvl="2"/>
             <a:r>
-              <a:rPr lang="en-US" smtClean="0"/>
+              <a:rPr lang="en-US"/>
               <a:t>Third level</a:t>
             </a:r>
           </a:p>
           <a:p>
             <a:pPr lvl="3"/>
             <a:r>
-              <a:rPr lang="en-US" smtClean="0"/>
+              <a:rPr lang="en-US"/>
               <a:t>Fourth level</a:t>
             </a:r>
           </a:p>
           <a:p>
             <a:pPr lvl="4"/>
             <a:r>
-              <a:rPr lang="en-US" smtClean="0"/>
+              <a:rPr lang="en-US"/>
               <a:t>Fifth level</a:t>
             </a:r>
-            <a:endParaRPr lang="en-US"/>
           </a:p>
         </p:txBody>
       </p:sp>
@@ -1662,7 +1664,7 @@
           <a:p>
             <a:pPr lvl="0"/>
             <a:r>
-              <a:rPr lang="en-US" smtClean="0"/>
+              <a:rPr lang="en-US"/>
               <a:t>Click to edit Master text styles</a:t>
             </a:r>
           </a:p>
@@ -1718,38 +1720,37 @@
           <a:p>
             <a:pPr lvl="0"/>
             <a:r>
-              <a:rPr lang="en-US" smtClean="0"/>
+              <a:rPr lang="en-US"/>
               <a:t>Click to edit Master text styles</a:t>
             </a:r>
           </a:p>
           <a:p>
             <a:pPr lvl="1"/>
             <a:r>
-              <a:rPr lang="en-US" smtClean="0"/>
+              <a:rPr lang="en-US"/>
               <a:t>Second level</a:t>
             </a:r>
           </a:p>
           <a:p>
             <a:pPr lvl="2"/>
             <a:r>
-              <a:rPr lang="en-US" smtClean="0"/>
+              <a:rPr lang="en-US"/>
               <a:t>Third level</a:t>
             </a:r>
           </a:p>
           <a:p>
             <a:pPr lvl="3"/>
             <a:r>
-              <a:rPr lang="en-US" smtClean="0"/>
+              <a:rPr lang="en-US"/>
               <a:t>Fourth level</a:t>
             </a:r>
           </a:p>
           <a:p>
             <a:pPr lvl="4"/>
             <a:r>
-              <a:rPr lang="en-US" smtClean="0"/>
+              <a:rPr lang="en-US"/>
               <a:t>Fifth level</a:t>
             </a:r>
-            <a:endParaRPr lang="en-US"/>
           </a:p>
         </p:txBody>
       </p:sp>
@@ -1770,7 +1771,7 @@
           <a:p>
             <a:fld id="{5BCAD085-E8A6-8845-BD4E-CB4CCA059FC4}" type="datetimeFigureOut">
               <a:rPr lang="en-US" smtClean="0"/>
-              <a:t>1/27/13</a:t>
+              <a:t>4/17/2026</a:t>
             </a:fld>
             <a:endParaRPr lang="en-US"/>
           </a:p>
@@ -1864,10 +1865,9 @@
           <a:lstStyle/>
           <a:p>
             <a:r>
-              <a:rPr lang="en-US" smtClean="0"/>
+              <a:rPr lang="en-US"/>
               <a:t>Click to edit Master title style</a:t>
             </a:r>
-            <a:endParaRPr lang="en-US"/>
           </a:p>
         </p:txBody>
       </p:sp>
@@ -1888,7 +1888,7 @@
           <a:p>
             <a:fld id="{5BCAD085-E8A6-8845-BD4E-CB4CCA059FC4}" type="datetimeFigureOut">
               <a:rPr lang="en-US" smtClean="0"/>
-              <a:t>1/27/13</a:t>
+              <a:t>4/17/2026</a:t>
             </a:fld>
             <a:endParaRPr lang="en-US"/>
           </a:p>
@@ -1983,7 +1983,7 @@
           <a:p>
             <a:fld id="{5BCAD085-E8A6-8845-BD4E-CB4CCA059FC4}" type="datetimeFigureOut">
               <a:rPr lang="en-US" smtClean="0"/>
-              <a:t>1/27/13</a:t>
+              <a:t>4/17/2026</a:t>
             </a:fld>
             <a:endParaRPr lang="en-US"/>
           </a:p>
@@ -2086,10 +2086,9 @@
           </a:lstStyle>
           <a:p>
             <a:r>
-              <a:rPr lang="en-US" smtClean="0"/>
+              <a:rPr lang="en-US"/>
               <a:t>Click to edit Master title style</a:t>
             </a:r>
-            <a:endParaRPr lang="en-US"/>
           </a:p>
         </p:txBody>
       </p:sp>
@@ -2143,38 +2142,37 @@
           <a:p>
             <a:pPr lvl="0"/>
             <a:r>
-              <a:rPr lang="en-US" smtClean="0"/>
+              <a:rPr lang="en-US"/>
               <a:t>Click to edit Master text styles</a:t>
             </a:r>
           </a:p>
           <a:p>
             <a:pPr lvl="1"/>
             <a:r>
-              <a:rPr lang="en-US" smtClean="0"/>
+              <a:rPr lang="en-US"/>
               <a:t>Second level</a:t>
             </a:r>
           </a:p>
           <a:p>
             <a:pPr lvl="2"/>
             <a:r>
-              <a:rPr lang="en-US" smtClean="0"/>
+              <a:rPr lang="en-US"/>
               <a:t>Third level</a:t>
             </a:r>
           </a:p>
           <a:p>
             <a:pPr lvl="3"/>
             <a:r>
-              <a:rPr lang="en-US" smtClean="0"/>
+              <a:rPr lang="en-US"/>
               <a:t>Fourth level</a:t>
             </a:r>
           </a:p>
           <a:p>
             <a:pPr lvl="4"/>
             <a:r>
-              <a:rPr lang="en-US" smtClean="0"/>
+              <a:rPr lang="en-US"/>
               <a:t>Fifth level</a:t>
             </a:r>
-            <a:endParaRPr lang="en-US"/>
           </a:p>
         </p:txBody>
       </p:sp>
@@ -2237,7 +2235,7 @@
           <a:p>
             <a:pPr lvl="0"/>
             <a:r>
-              <a:rPr lang="en-US" smtClean="0"/>
+              <a:rPr lang="en-US"/>
               <a:t>Click to edit Master text styles</a:t>
             </a:r>
           </a:p>
@@ -2260,7 +2258,7 @@
           <a:p>
             <a:fld id="{5BCAD085-E8A6-8845-BD4E-CB4CCA059FC4}" type="datetimeFigureOut">
               <a:rPr lang="en-US" smtClean="0"/>
-              <a:t>1/27/13</a:t>
+              <a:t>4/17/2026</a:t>
             </a:fld>
             <a:endParaRPr lang="en-US"/>
           </a:p>
@@ -2363,10 +2361,9 @@
           </a:lstStyle>
           <a:p>
             <a:r>
-              <a:rPr lang="en-US" smtClean="0"/>
+              <a:rPr lang="en-US"/>
               <a:t>Click to edit Master title style</a:t>
             </a:r>
-            <a:endParaRPr lang="en-US"/>
           </a:p>
         </p:txBody>
       </p:sp>
@@ -2490,7 +2487,7 @@
           <a:p>
             <a:pPr lvl="0"/>
             <a:r>
-              <a:rPr lang="en-US" smtClean="0"/>
+              <a:rPr lang="en-US"/>
               <a:t>Click to edit Master text styles</a:t>
             </a:r>
           </a:p>
@@ -2513,7 +2510,7 @@
           <a:p>
             <a:fld id="{5BCAD085-E8A6-8845-BD4E-CB4CCA059FC4}" type="datetimeFigureOut">
               <a:rPr lang="en-US" smtClean="0"/>
-              <a:t>1/27/13</a:t>
+              <a:t>4/17/2026</a:t>
             </a:fld>
             <a:endParaRPr lang="en-US"/>
           </a:p>
@@ -2622,10 +2619,9 @@
           <a:lstStyle/>
           <a:p>
             <a:r>
-              <a:rPr lang="en-US" smtClean="0"/>
+              <a:rPr lang="en-US"/>
               <a:t>Click to edit Master title style</a:t>
             </a:r>
-            <a:endParaRPr lang="en-US"/>
           </a:p>
         </p:txBody>
       </p:sp>
@@ -2656,38 +2652,37 @@
           <a:p>
             <a:pPr lvl="0"/>
             <a:r>
-              <a:rPr lang="en-US" smtClean="0"/>
+              <a:rPr lang="en-US"/>
               <a:t>Click to edit Master text styles</a:t>
             </a:r>
           </a:p>
           <a:p>
             <a:pPr lvl="1"/>
             <a:r>
-              <a:rPr lang="en-US" smtClean="0"/>
+              <a:rPr lang="en-US"/>
               <a:t>Second level</a:t>
             </a:r>
           </a:p>
           <a:p>
             <a:pPr lvl="2"/>
             <a:r>
-              <a:rPr lang="en-US" smtClean="0"/>
+              <a:rPr lang="en-US"/>
               <a:t>Third level</a:t>
             </a:r>
           </a:p>
           <a:p>
             <a:pPr lvl="3"/>
             <a:r>
-              <a:rPr lang="en-US" smtClean="0"/>
+              <a:rPr lang="en-US"/>
               <a:t>Fourth level</a:t>
             </a:r>
           </a:p>
           <a:p>
             <a:pPr lvl="4"/>
             <a:r>
-              <a:rPr lang="en-US" smtClean="0"/>
+              <a:rPr lang="en-US"/>
               <a:t>Fifth level</a:t>
             </a:r>
-            <a:endParaRPr lang="en-US"/>
           </a:p>
         </p:txBody>
       </p:sp>
@@ -2726,7 +2721,7 @@
           <a:p>
             <a:fld id="{5BCAD085-E8A6-8845-BD4E-CB4CCA059FC4}" type="datetimeFigureOut">
               <a:rPr lang="en-US" smtClean="0"/>
-              <a:t>1/27/13</a:t>
+              <a:t>4/17/2026</a:t>
             </a:fld>
             <a:endParaRPr lang="en-US"/>
           </a:p>
@@ -3085,7 +3080,7 @@
 </file>
 
 <file path=ppt/slides/slide1.xml><?xml version="1.0" encoding="utf-8"?>
-<p:sld xmlns:a="http://schemas.openxmlformats.org/drawingml/2006/main" xmlns:p="http://schemas.openxmlformats.org/presentationml/2006/main" xmlns:r="http://schemas.openxmlformats.org/officeDocument/2006/relationships">
+<p:sld xmlns:a="http://schemas.openxmlformats.org/drawingml/2006/main" xmlns:r="http://schemas.openxmlformats.org/officeDocument/2006/relationships" xmlns:p="http://schemas.openxmlformats.org/presentationml/2006/main">
   <p:cSld>
     <p:spTree>
       <p:nvGrpSpPr>
@@ -3093,7 +3088,14 @@
         <p:cNvGrpSpPr/>
         <p:nvPr/>
       </p:nvGrpSpPr>
-      <p:grpSpPr/>
+      <p:grpSpPr>
+        <a:xfrm>
+          <a:off x="0" y="0"/>
+          <a:ext cx="0" cy="0"/>
+          <a:chOff x="0" y="0"/>
+          <a:chExt cx="0" cy="0"/>
+        </a:xfrm>
+      </p:grpSpPr>
       <p:sp>
         <p:nvSpPr>
           <p:cNvPr id="2" name="Rectangle 1"/>
@@ -3134,6 +3136,7 @@
           <a:lstStyle/>
           <a:p>
             <a:pPr algn="ctr"/>
+            <a:endParaRPr/>
           </a:p>
         </p:txBody>
       </p:sp>
@@ -3213,7 +3216,7 @@
 </file>
 
 <file path=ppt/slides/slide2.xml><?xml version="1.0" encoding="utf-8"?>
-<p:sld xmlns:a="http://schemas.openxmlformats.org/drawingml/2006/main" xmlns:p="http://schemas.openxmlformats.org/presentationml/2006/main" xmlns:r="http://schemas.openxmlformats.org/officeDocument/2006/relationships">
+<p:sld xmlns:a="http://schemas.openxmlformats.org/drawingml/2006/main" xmlns:r="http://schemas.openxmlformats.org/officeDocument/2006/relationships" xmlns:p="http://schemas.openxmlformats.org/presentationml/2006/main">
   <p:cSld>
     <p:spTree>
       <p:nvGrpSpPr>
@@ -3221,7 +3224,14 @@
         <p:cNvGrpSpPr/>
         <p:nvPr/>
       </p:nvGrpSpPr>
-      <p:grpSpPr/>
+      <p:grpSpPr>
+        <a:xfrm>
+          <a:off x="0" y="0"/>
+          <a:ext cx="0" cy="0"/>
+          <a:chOff x="0" y="0"/>
+          <a:chExt cx="0" cy="0"/>
+        </a:xfrm>
+      </p:grpSpPr>
       <p:sp>
         <p:nvSpPr>
           <p:cNvPr id="2" name="TextBox 1"/>
@@ -3297,6 +3307,7 @@
           <a:lstStyle/>
           <a:p>
             <a:pPr algn="ctr"/>
+            <a:endParaRPr/>
           </a:p>
         </p:txBody>
       </p:sp>
@@ -3356,7 +3367,7 @@
 </file>
 
 <file path=ppt/slides/slide3.xml><?xml version="1.0" encoding="utf-8"?>
-<p:sld xmlns:a="http://schemas.openxmlformats.org/drawingml/2006/main" xmlns:p="http://schemas.openxmlformats.org/presentationml/2006/main" xmlns:r="http://schemas.openxmlformats.org/officeDocument/2006/relationships">
+<p:sld xmlns:a="http://schemas.openxmlformats.org/drawingml/2006/main" xmlns:r="http://schemas.openxmlformats.org/officeDocument/2006/relationships" xmlns:p="http://schemas.openxmlformats.org/presentationml/2006/main">
   <p:cSld>
     <p:spTree>
       <p:nvGrpSpPr>
@@ -3364,7 +3375,14 @@
         <p:cNvGrpSpPr/>
         <p:nvPr/>
       </p:nvGrpSpPr>
-      <p:grpSpPr/>
+      <p:grpSpPr>
+        <a:xfrm>
+          <a:off x="0" y="0"/>
+          <a:ext cx="0" cy="0"/>
+          <a:chOff x="0" y="0"/>
+          <a:chExt cx="0" cy="0"/>
+        </a:xfrm>
+      </p:grpSpPr>
       <p:sp>
         <p:nvSpPr>
           <p:cNvPr id="2" name="TextBox 1"/>
@@ -3440,6 +3458,7 @@
           <a:lstStyle/>
           <a:p>
             <a:pPr algn="ctr"/>
+            <a:endParaRPr/>
           </a:p>
         </p:txBody>
       </p:sp>
@@ -3507,7 +3526,7 @@
 </file>
 
 <file path=ppt/slides/slide4.xml><?xml version="1.0" encoding="utf-8"?>
-<p:sld xmlns:a="http://schemas.openxmlformats.org/drawingml/2006/main" xmlns:p="http://schemas.openxmlformats.org/presentationml/2006/main" xmlns:r="http://schemas.openxmlformats.org/officeDocument/2006/relationships">
+<p:sld xmlns:a="http://schemas.openxmlformats.org/drawingml/2006/main" xmlns:r="http://schemas.openxmlformats.org/officeDocument/2006/relationships" xmlns:p="http://schemas.openxmlformats.org/presentationml/2006/main">
   <p:cSld>
     <p:spTree>
       <p:nvGrpSpPr>
@@ -3515,7 +3534,14 @@
         <p:cNvGrpSpPr/>
         <p:nvPr/>
       </p:nvGrpSpPr>
-      <p:grpSpPr/>
+      <p:grpSpPr>
+        <a:xfrm>
+          <a:off x="0" y="0"/>
+          <a:ext cx="0" cy="0"/>
+          <a:chOff x="0" y="0"/>
+          <a:chExt cx="0" cy="0"/>
+        </a:xfrm>
+      </p:grpSpPr>
       <p:sp>
         <p:nvSpPr>
           <p:cNvPr id="2" name="TextBox 1"/>
@@ -3591,6 +3617,7 @@
           <a:lstStyle/>
           <a:p>
             <a:pPr algn="ctr"/>
+            <a:endParaRPr/>
           </a:p>
         </p:txBody>
       </p:sp>
@@ -3650,7 +3677,7 @@
 </file>
 
 <file path=ppt/slides/slide5.xml><?xml version="1.0" encoding="utf-8"?>
-<p:sld xmlns:a="http://schemas.openxmlformats.org/drawingml/2006/main" xmlns:p="http://schemas.openxmlformats.org/presentationml/2006/main" xmlns:r="http://schemas.openxmlformats.org/officeDocument/2006/relationships">
+<p:sld xmlns:a="http://schemas.openxmlformats.org/drawingml/2006/main" xmlns:r="http://schemas.openxmlformats.org/officeDocument/2006/relationships" xmlns:p="http://schemas.openxmlformats.org/presentationml/2006/main">
   <p:cSld>
     <p:spTree>
       <p:nvGrpSpPr>
@@ -3658,7 +3685,14 @@
         <p:cNvGrpSpPr/>
         <p:nvPr/>
       </p:nvGrpSpPr>
-      <p:grpSpPr/>
+      <p:grpSpPr>
+        <a:xfrm>
+          <a:off x="0" y="0"/>
+          <a:ext cx="0" cy="0"/>
+          <a:chOff x="0" y="0"/>
+          <a:chExt cx="0" cy="0"/>
+        </a:xfrm>
+      </p:grpSpPr>
       <p:sp>
         <p:nvSpPr>
           <p:cNvPr id="2" name="TextBox 1"/>
@@ -3734,6 +3768,7 @@
           <a:lstStyle/>
           <a:p>
             <a:pPr algn="ctr"/>
+            <a:endParaRPr/>
           </a:p>
         </p:txBody>
       </p:sp>
@@ -3793,7 +3828,7 @@
 </file>
 
 <file path=ppt/slides/slide6.xml><?xml version="1.0" encoding="utf-8"?>
-<p:sld xmlns:a="http://schemas.openxmlformats.org/drawingml/2006/main" xmlns:p="http://schemas.openxmlformats.org/presentationml/2006/main" xmlns:r="http://schemas.openxmlformats.org/officeDocument/2006/relationships">
+<p:sld xmlns:a="http://schemas.openxmlformats.org/drawingml/2006/main" xmlns:r="http://schemas.openxmlformats.org/officeDocument/2006/relationships" xmlns:p="http://schemas.openxmlformats.org/presentationml/2006/main">
   <p:cSld>
     <p:spTree>
       <p:nvGrpSpPr>
@@ -3801,7 +3836,14 @@
         <p:cNvGrpSpPr/>
         <p:nvPr/>
       </p:nvGrpSpPr>
-      <p:grpSpPr/>
+      <p:grpSpPr>
+        <a:xfrm>
+          <a:off x="0" y="0"/>
+          <a:ext cx="0" cy="0"/>
+          <a:chOff x="0" y="0"/>
+          <a:chExt cx="0" cy="0"/>
+        </a:xfrm>
+      </p:grpSpPr>
       <p:sp>
         <p:nvSpPr>
           <p:cNvPr id="2" name="TextBox 1"/>
@@ -3877,6 +3919,7 @@
           <a:lstStyle/>
           <a:p>
             <a:pPr algn="ctr"/>
+            <a:endParaRPr/>
           </a:p>
         </p:txBody>
       </p:sp>
@@ -3936,7 +3979,7 @@
 </file>
 
 <file path=ppt/slides/slide7.xml><?xml version="1.0" encoding="utf-8"?>
-<p:sld xmlns:a="http://schemas.openxmlformats.org/drawingml/2006/main" xmlns:p="http://schemas.openxmlformats.org/presentationml/2006/main" xmlns:r="http://schemas.openxmlformats.org/officeDocument/2006/relationships">
+<p:sld xmlns:a="http://schemas.openxmlformats.org/drawingml/2006/main" xmlns:r="http://schemas.openxmlformats.org/officeDocument/2006/relationships" xmlns:p="http://schemas.openxmlformats.org/presentationml/2006/main">
   <p:cSld>
     <p:spTree>
       <p:nvGrpSpPr>
@@ -3944,7 +3987,14 @@
         <p:cNvGrpSpPr/>
         <p:nvPr/>
       </p:nvGrpSpPr>
-      <p:grpSpPr/>
+      <p:grpSpPr>
+        <a:xfrm>
+          <a:off x="0" y="0"/>
+          <a:ext cx="0" cy="0"/>
+          <a:chOff x="0" y="0"/>
+          <a:chExt cx="0" cy="0"/>
+        </a:xfrm>
+      </p:grpSpPr>
       <p:sp>
         <p:nvSpPr>
           <p:cNvPr id="2" name="TextBox 1"/>
@@ -4020,6 +4070,7 @@
           <a:lstStyle/>
           <a:p>
             <a:pPr algn="ctr"/>
+            <a:endParaRPr/>
           </a:p>
         </p:txBody>
       </p:sp>

--- a/final_project_presentation.pptx
+++ b/final_project_presentation.pptx
@@ -5,15 +5,15 @@
     <p:sldMasterId id="2147483648" r:id="rId1"/>
   </p:sldMasterIdLst>
   <p:sldIdLst>
-    <p:sldId id="256" r:id="rId2"/>
-    <p:sldId id="257" r:id="rId3"/>
-    <p:sldId id="258" r:id="rId4"/>
-    <p:sldId id="259" r:id="rId5"/>
-    <p:sldId id="260" r:id="rId6"/>
-    <p:sldId id="261" r:id="rId7"/>
-    <p:sldId id="262" r:id="rId8"/>
+    <p:sldId id="256" r:id="rId7"/>
+    <p:sldId id="257" r:id="rId8"/>
+    <p:sldId id="258" r:id="rId9"/>
+    <p:sldId id="259" r:id="rId10"/>
+    <p:sldId id="260" r:id="rId11"/>
+    <p:sldId id="261" r:id="rId12"/>
+    <p:sldId id="262" r:id="rId13"/>
   </p:sldIdLst>
-  <p:sldSz cx="12192000" cy="6858000"/>
+  <p:sldSz cx="12191695" cy="6858000" type="screen4x3"/>
   <p:notesSz cx="6858000" cy="9144000"/>
   <p:defaultTextStyle>
     <a:defPPr>
@@ -110,22 +110,6 @@
       </a:defRPr>
     </a:lvl9pPr>
   </p:defaultTextStyle>
-  <p:extLst>
-    <p:ext uri="{EFAFB233-063F-42B5-8137-9DF3F51BA10A}">
-      <p15:sldGuideLst xmlns:p15="http://schemas.microsoft.com/office/powerpoint/2012/main">
-        <p15:guide id="1" orient="horz" pos="2160">
-          <p15:clr>
-            <a:srgbClr val="A4A3A4"/>
-          </p15:clr>
-        </p15:guide>
-        <p15:guide id="2" pos="2880">
-          <p15:clr>
-            <a:srgbClr val="A4A3A4"/>
-          </p15:clr>
-        </p15:guide>
-      </p15:sldGuideLst>
-    </p:ext>
-  </p:extLst>
 </p:presentation>
 </file>
 
@@ -167,9 +151,10 @@
           <a:lstStyle/>
           <a:p>
             <a:r>
-              <a:rPr lang="en-US"/>
+              <a:rPr lang="en-US" smtClean="0"/>
               <a:t>Click to edit Master title style</a:t>
             </a:r>
+            <a:endParaRPr lang="en-US"/>
           </a:p>
         </p:txBody>
       </p:sp>
@@ -285,9 +270,10 @@
           </a:lstStyle>
           <a:p>
             <a:r>
-              <a:rPr lang="en-US"/>
+              <a:rPr lang="en-US" smtClean="0"/>
               <a:t>Click to edit Master subtitle style</a:t>
             </a:r>
+            <a:endParaRPr lang="en-US"/>
           </a:p>
         </p:txBody>
       </p:sp>
@@ -308,7 +294,7 @@
           <a:p>
             <a:fld id="{5BCAD085-E8A6-8845-BD4E-CB4CCA059FC4}" type="datetimeFigureOut">
               <a:rPr lang="en-US" smtClean="0"/>
-              <a:t>4/17/2026</a:t>
+              <a:t>1/27/13</a:t>
             </a:fld>
             <a:endParaRPr lang="en-US"/>
           </a:p>
@@ -402,9 +388,10 @@
           <a:lstStyle/>
           <a:p>
             <a:r>
-              <a:rPr lang="en-US"/>
+              <a:rPr lang="en-US" smtClean="0"/>
               <a:t>Click to edit Master title style</a:t>
             </a:r>
+            <a:endParaRPr lang="en-US"/>
           </a:p>
         </p:txBody>
       </p:sp>
@@ -425,37 +412,38 @@
           <a:p>
             <a:pPr lvl="0"/>
             <a:r>
-              <a:rPr lang="en-US"/>
+              <a:rPr lang="en-US" smtClean="0"/>
               <a:t>Click to edit Master text styles</a:t>
             </a:r>
           </a:p>
           <a:p>
             <a:pPr lvl="1"/>
             <a:r>
-              <a:rPr lang="en-US"/>
+              <a:rPr lang="en-US" smtClean="0"/>
               <a:t>Second level</a:t>
             </a:r>
           </a:p>
           <a:p>
             <a:pPr lvl="2"/>
             <a:r>
-              <a:rPr lang="en-US"/>
+              <a:rPr lang="en-US" smtClean="0"/>
               <a:t>Third level</a:t>
             </a:r>
           </a:p>
           <a:p>
             <a:pPr lvl="3"/>
             <a:r>
-              <a:rPr lang="en-US"/>
+              <a:rPr lang="en-US" smtClean="0"/>
               <a:t>Fourth level</a:t>
             </a:r>
           </a:p>
           <a:p>
             <a:pPr lvl="4"/>
             <a:r>
-              <a:rPr lang="en-US"/>
+              <a:rPr lang="en-US" smtClean="0"/>
               <a:t>Fifth level</a:t>
             </a:r>
+            <a:endParaRPr lang="en-US"/>
           </a:p>
         </p:txBody>
       </p:sp>
@@ -476,7 +464,7 @@
           <a:p>
             <a:fld id="{5BCAD085-E8A6-8845-BD4E-CB4CCA059FC4}" type="datetimeFigureOut">
               <a:rPr lang="en-US" smtClean="0"/>
-              <a:t>4/17/2026</a:t>
+              <a:t>1/27/13</a:t>
             </a:fld>
             <a:endParaRPr lang="en-US"/>
           </a:p>
@@ -575,9 +563,10 @@
           <a:lstStyle/>
           <a:p>
             <a:r>
-              <a:rPr lang="en-US"/>
+              <a:rPr lang="en-US" smtClean="0"/>
               <a:t>Click to edit Master title style</a:t>
             </a:r>
+            <a:endParaRPr lang="en-US"/>
           </a:p>
         </p:txBody>
       </p:sp>
@@ -603,37 +592,38 @@
           <a:p>
             <a:pPr lvl="0"/>
             <a:r>
-              <a:rPr lang="en-US"/>
+              <a:rPr lang="en-US" smtClean="0"/>
               <a:t>Click to edit Master text styles</a:t>
             </a:r>
           </a:p>
           <a:p>
             <a:pPr lvl="1"/>
             <a:r>
-              <a:rPr lang="en-US"/>
+              <a:rPr lang="en-US" smtClean="0"/>
               <a:t>Second level</a:t>
             </a:r>
           </a:p>
           <a:p>
             <a:pPr lvl="2"/>
             <a:r>
-              <a:rPr lang="en-US"/>
+              <a:rPr lang="en-US" smtClean="0"/>
               <a:t>Third level</a:t>
             </a:r>
           </a:p>
           <a:p>
             <a:pPr lvl="3"/>
             <a:r>
-              <a:rPr lang="en-US"/>
+              <a:rPr lang="en-US" smtClean="0"/>
               <a:t>Fourth level</a:t>
             </a:r>
           </a:p>
           <a:p>
             <a:pPr lvl="4"/>
             <a:r>
-              <a:rPr lang="en-US"/>
+              <a:rPr lang="en-US" smtClean="0"/>
               <a:t>Fifth level</a:t>
             </a:r>
+            <a:endParaRPr lang="en-US"/>
           </a:p>
         </p:txBody>
       </p:sp>
@@ -654,7 +644,7 @@
           <a:p>
             <a:fld id="{5BCAD085-E8A6-8845-BD4E-CB4CCA059FC4}" type="datetimeFigureOut">
               <a:rPr lang="en-US" smtClean="0"/>
-              <a:t>4/17/2026</a:t>
+              <a:t>1/27/13</a:t>
             </a:fld>
             <a:endParaRPr lang="en-US"/>
           </a:p>
@@ -748,9 +738,10 @@
           <a:lstStyle/>
           <a:p>
             <a:r>
-              <a:rPr lang="en-US"/>
+              <a:rPr lang="en-US" smtClean="0"/>
               <a:t>Click to edit Master title style</a:t>
             </a:r>
+            <a:endParaRPr lang="en-US"/>
           </a:p>
         </p:txBody>
       </p:sp>
@@ -771,37 +762,38 @@
           <a:p>
             <a:pPr lvl="0"/>
             <a:r>
-              <a:rPr lang="en-US"/>
+              <a:rPr lang="en-US" smtClean="0"/>
               <a:t>Click to edit Master text styles</a:t>
             </a:r>
           </a:p>
           <a:p>
             <a:pPr lvl="1"/>
             <a:r>
-              <a:rPr lang="en-US"/>
+              <a:rPr lang="en-US" smtClean="0"/>
               <a:t>Second level</a:t>
             </a:r>
           </a:p>
           <a:p>
             <a:pPr lvl="2"/>
             <a:r>
-              <a:rPr lang="en-US"/>
+              <a:rPr lang="en-US" smtClean="0"/>
               <a:t>Third level</a:t>
             </a:r>
           </a:p>
           <a:p>
             <a:pPr lvl="3"/>
             <a:r>
-              <a:rPr lang="en-US"/>
+              <a:rPr lang="en-US" smtClean="0"/>
               <a:t>Fourth level</a:t>
             </a:r>
           </a:p>
           <a:p>
             <a:pPr lvl="4"/>
             <a:r>
-              <a:rPr lang="en-US"/>
+              <a:rPr lang="en-US" smtClean="0"/>
               <a:t>Fifth level</a:t>
             </a:r>
+            <a:endParaRPr lang="en-US"/>
           </a:p>
         </p:txBody>
       </p:sp>
@@ -822,7 +814,7 @@
           <a:p>
             <a:fld id="{5BCAD085-E8A6-8845-BD4E-CB4CCA059FC4}" type="datetimeFigureOut">
               <a:rPr lang="en-US" smtClean="0"/>
-              <a:t>4/17/2026</a:t>
+              <a:t>1/27/13</a:t>
             </a:fld>
             <a:endParaRPr lang="en-US"/>
           </a:p>
@@ -925,9 +917,10 @@
           </a:lstStyle>
           <a:p>
             <a:r>
-              <a:rPr lang="en-US"/>
+              <a:rPr lang="en-US" smtClean="0"/>
               <a:t>Click to edit Master title style</a:t>
             </a:r>
+            <a:endParaRPr lang="en-US"/>
           </a:p>
         </p:txBody>
       </p:sp>
@@ -1044,7 +1037,7 @@
           <a:p>
             <a:pPr lvl="0"/>
             <a:r>
-              <a:rPr lang="en-US"/>
+              <a:rPr lang="en-US" smtClean="0"/>
               <a:t>Click to edit Master text styles</a:t>
             </a:r>
           </a:p>
@@ -1067,7 +1060,7 @@
           <a:p>
             <a:fld id="{5BCAD085-E8A6-8845-BD4E-CB4CCA059FC4}" type="datetimeFigureOut">
               <a:rPr lang="en-US" smtClean="0"/>
-              <a:t>4/17/2026</a:t>
+              <a:t>1/27/13</a:t>
             </a:fld>
             <a:endParaRPr lang="en-US"/>
           </a:p>
@@ -1161,9 +1154,10 @@
           <a:lstStyle/>
           <a:p>
             <a:r>
-              <a:rPr lang="en-US"/>
+              <a:rPr lang="en-US" smtClean="0"/>
               <a:t>Click to edit Master title style</a:t>
             </a:r>
+            <a:endParaRPr lang="en-US"/>
           </a:p>
         </p:txBody>
       </p:sp>
@@ -1217,37 +1211,38 @@
           <a:p>
             <a:pPr lvl="0"/>
             <a:r>
-              <a:rPr lang="en-US"/>
+              <a:rPr lang="en-US" smtClean="0"/>
               <a:t>Click to edit Master text styles</a:t>
             </a:r>
           </a:p>
           <a:p>
             <a:pPr lvl="1"/>
             <a:r>
-              <a:rPr lang="en-US"/>
+              <a:rPr lang="en-US" smtClean="0"/>
               <a:t>Second level</a:t>
             </a:r>
           </a:p>
           <a:p>
             <a:pPr lvl="2"/>
             <a:r>
-              <a:rPr lang="en-US"/>
+              <a:rPr lang="en-US" smtClean="0"/>
               <a:t>Third level</a:t>
             </a:r>
           </a:p>
           <a:p>
             <a:pPr lvl="3"/>
             <a:r>
-              <a:rPr lang="en-US"/>
+              <a:rPr lang="en-US" smtClean="0"/>
               <a:t>Fourth level</a:t>
             </a:r>
           </a:p>
           <a:p>
             <a:pPr lvl="4"/>
             <a:r>
-              <a:rPr lang="en-US"/>
+              <a:rPr lang="en-US" smtClean="0"/>
               <a:t>Fifth level</a:t>
             </a:r>
+            <a:endParaRPr lang="en-US"/>
           </a:p>
         </p:txBody>
       </p:sp>
@@ -1301,37 +1296,38 @@
           <a:p>
             <a:pPr lvl="0"/>
             <a:r>
-              <a:rPr lang="en-US"/>
+              <a:rPr lang="en-US" smtClean="0"/>
               <a:t>Click to edit Master text styles</a:t>
             </a:r>
           </a:p>
           <a:p>
             <a:pPr lvl="1"/>
             <a:r>
-              <a:rPr lang="en-US"/>
+              <a:rPr lang="en-US" smtClean="0"/>
               <a:t>Second level</a:t>
             </a:r>
           </a:p>
           <a:p>
             <a:pPr lvl="2"/>
             <a:r>
-              <a:rPr lang="en-US"/>
+              <a:rPr lang="en-US" smtClean="0"/>
               <a:t>Third level</a:t>
             </a:r>
           </a:p>
           <a:p>
             <a:pPr lvl="3"/>
             <a:r>
-              <a:rPr lang="en-US"/>
+              <a:rPr lang="en-US" smtClean="0"/>
               <a:t>Fourth level</a:t>
             </a:r>
           </a:p>
           <a:p>
             <a:pPr lvl="4"/>
             <a:r>
-              <a:rPr lang="en-US"/>
+              <a:rPr lang="en-US" smtClean="0"/>
               <a:t>Fifth level</a:t>
             </a:r>
+            <a:endParaRPr lang="en-US"/>
           </a:p>
         </p:txBody>
       </p:sp>
@@ -1352,7 +1348,7 @@
           <a:p>
             <a:fld id="{5BCAD085-E8A6-8845-BD4E-CB4CCA059FC4}" type="datetimeFigureOut">
               <a:rPr lang="en-US" smtClean="0"/>
-              <a:t>4/17/2026</a:t>
+              <a:t>1/27/13</a:t>
             </a:fld>
             <a:endParaRPr lang="en-US"/>
           </a:p>
@@ -1450,9 +1446,10 @@
           </a:lstStyle>
           <a:p>
             <a:r>
-              <a:rPr lang="en-US"/>
+              <a:rPr lang="en-US" smtClean="0"/>
               <a:t>Click to edit Master title style</a:t>
             </a:r>
+            <a:endParaRPr lang="en-US"/>
           </a:p>
         </p:txBody>
       </p:sp>
@@ -1515,7 +1512,7 @@
           <a:p>
             <a:pPr lvl="0"/>
             <a:r>
-              <a:rPr lang="en-US"/>
+              <a:rPr lang="en-US" smtClean="0"/>
               <a:t>Click to edit Master text styles</a:t>
             </a:r>
           </a:p>
@@ -1571,37 +1568,38 @@
           <a:p>
             <a:pPr lvl="0"/>
             <a:r>
-              <a:rPr lang="en-US"/>
+              <a:rPr lang="en-US" smtClean="0"/>
               <a:t>Click to edit Master text styles</a:t>
             </a:r>
           </a:p>
           <a:p>
             <a:pPr lvl="1"/>
             <a:r>
-              <a:rPr lang="en-US"/>
+              <a:rPr lang="en-US" smtClean="0"/>
               <a:t>Second level</a:t>
             </a:r>
           </a:p>
           <a:p>
             <a:pPr lvl="2"/>
             <a:r>
-              <a:rPr lang="en-US"/>
+              <a:rPr lang="en-US" smtClean="0"/>
               <a:t>Third level</a:t>
             </a:r>
           </a:p>
           <a:p>
             <a:pPr lvl="3"/>
             <a:r>
-              <a:rPr lang="en-US"/>
+              <a:rPr lang="en-US" smtClean="0"/>
               <a:t>Fourth level</a:t>
             </a:r>
           </a:p>
           <a:p>
             <a:pPr lvl="4"/>
             <a:r>
-              <a:rPr lang="en-US"/>
+              <a:rPr lang="en-US" smtClean="0"/>
               <a:t>Fifth level</a:t>
             </a:r>
+            <a:endParaRPr lang="en-US"/>
           </a:p>
         </p:txBody>
       </p:sp>
@@ -1664,7 +1662,7 @@
           <a:p>
             <a:pPr lvl="0"/>
             <a:r>
-              <a:rPr lang="en-US"/>
+              <a:rPr lang="en-US" smtClean="0"/>
               <a:t>Click to edit Master text styles</a:t>
             </a:r>
           </a:p>
@@ -1720,37 +1718,38 @@
           <a:p>
             <a:pPr lvl="0"/>
             <a:r>
-              <a:rPr lang="en-US"/>
+              <a:rPr lang="en-US" smtClean="0"/>
               <a:t>Click to edit Master text styles</a:t>
             </a:r>
           </a:p>
           <a:p>
             <a:pPr lvl="1"/>
             <a:r>
-              <a:rPr lang="en-US"/>
+              <a:rPr lang="en-US" smtClean="0"/>
               <a:t>Second level</a:t>
             </a:r>
           </a:p>
           <a:p>
             <a:pPr lvl="2"/>
             <a:r>
-              <a:rPr lang="en-US"/>
+              <a:rPr lang="en-US" smtClean="0"/>
               <a:t>Third level</a:t>
             </a:r>
           </a:p>
           <a:p>
             <a:pPr lvl="3"/>
             <a:r>
-              <a:rPr lang="en-US"/>
+              <a:rPr lang="en-US" smtClean="0"/>
               <a:t>Fourth level</a:t>
             </a:r>
           </a:p>
           <a:p>
             <a:pPr lvl="4"/>
             <a:r>
-              <a:rPr lang="en-US"/>
+              <a:rPr lang="en-US" smtClean="0"/>
               <a:t>Fifth level</a:t>
             </a:r>
+            <a:endParaRPr lang="en-US"/>
           </a:p>
         </p:txBody>
       </p:sp>
@@ -1771,7 +1770,7 @@
           <a:p>
             <a:fld id="{5BCAD085-E8A6-8845-BD4E-CB4CCA059FC4}" type="datetimeFigureOut">
               <a:rPr lang="en-US" smtClean="0"/>
-              <a:t>4/17/2026</a:t>
+              <a:t>1/27/13</a:t>
             </a:fld>
             <a:endParaRPr lang="en-US"/>
           </a:p>
@@ -1865,9 +1864,10 @@
           <a:lstStyle/>
           <a:p>
             <a:r>
-              <a:rPr lang="en-US"/>
+              <a:rPr lang="en-US" smtClean="0"/>
               <a:t>Click to edit Master title style</a:t>
             </a:r>
+            <a:endParaRPr lang="en-US"/>
           </a:p>
         </p:txBody>
       </p:sp>
@@ -1888,7 +1888,7 @@
           <a:p>
             <a:fld id="{5BCAD085-E8A6-8845-BD4E-CB4CCA059FC4}" type="datetimeFigureOut">
               <a:rPr lang="en-US" smtClean="0"/>
-              <a:t>4/17/2026</a:t>
+              <a:t>1/27/13</a:t>
             </a:fld>
             <a:endParaRPr lang="en-US"/>
           </a:p>
@@ -1983,7 +1983,7 @@
           <a:p>
             <a:fld id="{5BCAD085-E8A6-8845-BD4E-CB4CCA059FC4}" type="datetimeFigureOut">
               <a:rPr lang="en-US" smtClean="0"/>
-              <a:t>4/17/2026</a:t>
+              <a:t>1/27/13</a:t>
             </a:fld>
             <a:endParaRPr lang="en-US"/>
           </a:p>
@@ -2086,9 +2086,10 @@
           </a:lstStyle>
           <a:p>
             <a:r>
-              <a:rPr lang="en-US"/>
+              <a:rPr lang="en-US" smtClean="0"/>
               <a:t>Click to edit Master title style</a:t>
             </a:r>
+            <a:endParaRPr lang="en-US"/>
           </a:p>
         </p:txBody>
       </p:sp>
@@ -2142,37 +2143,38 @@
           <a:p>
             <a:pPr lvl="0"/>
             <a:r>
-              <a:rPr lang="en-US"/>
+              <a:rPr lang="en-US" smtClean="0"/>
               <a:t>Click to edit Master text styles</a:t>
             </a:r>
           </a:p>
           <a:p>
             <a:pPr lvl="1"/>
             <a:r>
-              <a:rPr lang="en-US"/>
+              <a:rPr lang="en-US" smtClean="0"/>
               <a:t>Second level</a:t>
             </a:r>
           </a:p>
           <a:p>
             <a:pPr lvl="2"/>
             <a:r>
-              <a:rPr lang="en-US"/>
+              <a:rPr lang="en-US" smtClean="0"/>
               <a:t>Third level</a:t>
             </a:r>
           </a:p>
           <a:p>
             <a:pPr lvl="3"/>
             <a:r>
-              <a:rPr lang="en-US"/>
+              <a:rPr lang="en-US" smtClean="0"/>
               <a:t>Fourth level</a:t>
             </a:r>
           </a:p>
           <a:p>
             <a:pPr lvl="4"/>
             <a:r>
-              <a:rPr lang="en-US"/>
+              <a:rPr lang="en-US" smtClean="0"/>
               <a:t>Fifth level</a:t>
             </a:r>
+            <a:endParaRPr lang="en-US"/>
           </a:p>
         </p:txBody>
       </p:sp>
@@ -2235,7 +2237,7 @@
           <a:p>
             <a:pPr lvl="0"/>
             <a:r>
-              <a:rPr lang="en-US"/>
+              <a:rPr lang="en-US" smtClean="0"/>
               <a:t>Click to edit Master text styles</a:t>
             </a:r>
           </a:p>
@@ -2258,7 +2260,7 @@
           <a:p>
             <a:fld id="{5BCAD085-E8A6-8845-BD4E-CB4CCA059FC4}" type="datetimeFigureOut">
               <a:rPr lang="en-US" smtClean="0"/>
-              <a:t>4/17/2026</a:t>
+              <a:t>1/27/13</a:t>
             </a:fld>
             <a:endParaRPr lang="en-US"/>
           </a:p>
@@ -2361,9 +2363,10 @@
           </a:lstStyle>
           <a:p>
             <a:r>
-              <a:rPr lang="en-US"/>
+              <a:rPr lang="en-US" smtClean="0"/>
               <a:t>Click to edit Master title style</a:t>
             </a:r>
+            <a:endParaRPr lang="en-US"/>
           </a:p>
         </p:txBody>
       </p:sp>
@@ -2487,7 +2490,7 @@
           <a:p>
             <a:pPr lvl="0"/>
             <a:r>
-              <a:rPr lang="en-US"/>
+              <a:rPr lang="en-US" smtClean="0"/>
               <a:t>Click to edit Master text styles</a:t>
             </a:r>
           </a:p>
@@ -2510,7 +2513,7 @@
           <a:p>
             <a:fld id="{5BCAD085-E8A6-8845-BD4E-CB4CCA059FC4}" type="datetimeFigureOut">
               <a:rPr lang="en-US" smtClean="0"/>
-              <a:t>4/17/2026</a:t>
+              <a:t>1/27/13</a:t>
             </a:fld>
             <a:endParaRPr lang="en-US"/>
           </a:p>
@@ -2619,9 +2622,10 @@
           <a:lstStyle/>
           <a:p>
             <a:r>
-              <a:rPr lang="en-US"/>
+              <a:rPr lang="en-US" smtClean="0"/>
               <a:t>Click to edit Master title style</a:t>
             </a:r>
+            <a:endParaRPr lang="en-US"/>
           </a:p>
         </p:txBody>
       </p:sp>
@@ -2652,37 +2656,38 @@
           <a:p>
             <a:pPr lvl="0"/>
             <a:r>
-              <a:rPr lang="en-US"/>
+              <a:rPr lang="en-US" smtClean="0"/>
               <a:t>Click to edit Master text styles</a:t>
             </a:r>
           </a:p>
           <a:p>
             <a:pPr lvl="1"/>
             <a:r>
-              <a:rPr lang="en-US"/>
+              <a:rPr lang="en-US" smtClean="0"/>
               <a:t>Second level</a:t>
             </a:r>
           </a:p>
           <a:p>
             <a:pPr lvl="2"/>
             <a:r>
-              <a:rPr lang="en-US"/>
+              <a:rPr lang="en-US" smtClean="0"/>
               <a:t>Third level</a:t>
             </a:r>
           </a:p>
           <a:p>
             <a:pPr lvl="3"/>
             <a:r>
-              <a:rPr lang="en-US"/>
+              <a:rPr lang="en-US" smtClean="0"/>
               <a:t>Fourth level</a:t>
             </a:r>
           </a:p>
           <a:p>
             <a:pPr lvl="4"/>
             <a:r>
-              <a:rPr lang="en-US"/>
+              <a:rPr lang="en-US" smtClean="0"/>
               <a:t>Fifth level</a:t>
             </a:r>
+            <a:endParaRPr lang="en-US"/>
           </a:p>
         </p:txBody>
       </p:sp>
@@ -2721,7 +2726,7 @@
           <a:p>
             <a:fld id="{5BCAD085-E8A6-8845-BD4E-CB4CCA059FC4}" type="datetimeFigureOut">
               <a:rPr lang="en-US" smtClean="0"/>
-              <a:t>4/17/2026</a:t>
+              <a:t>1/27/13</a:t>
             </a:fld>
             <a:endParaRPr lang="en-US"/>
           </a:p>
@@ -3080,7 +3085,7 @@
 </file>
 
 <file path=ppt/slides/slide1.xml><?xml version="1.0" encoding="utf-8"?>
-<p:sld xmlns:a="http://schemas.openxmlformats.org/drawingml/2006/main" xmlns:r="http://schemas.openxmlformats.org/officeDocument/2006/relationships" xmlns:p="http://schemas.openxmlformats.org/presentationml/2006/main">
+<p:sld xmlns:a="http://schemas.openxmlformats.org/drawingml/2006/main" xmlns:p="http://schemas.openxmlformats.org/presentationml/2006/main" xmlns:r="http://schemas.openxmlformats.org/officeDocument/2006/relationships">
   <p:cSld>
     <p:spTree>
       <p:nvGrpSpPr>
@@ -3088,14 +3093,7 @@
         <p:cNvGrpSpPr/>
         <p:nvPr/>
       </p:nvGrpSpPr>
-      <p:grpSpPr>
-        <a:xfrm>
-          <a:off x="0" y="0"/>
-          <a:ext cx="0" cy="0"/>
-          <a:chOff x="0" y="0"/>
-          <a:chExt cx="0" cy="0"/>
-        </a:xfrm>
-      </p:grpSpPr>
+      <p:grpSpPr/>
       <p:sp>
         <p:nvSpPr>
           <p:cNvPr id="2" name="Rectangle 1"/>
@@ -3136,7 +3134,6 @@
           <a:lstStyle/>
           <a:p>
             <a:pPr algn="ctr"/>
-            <a:endParaRPr/>
           </a:p>
         </p:txBody>
       </p:sp>
@@ -3216,7 +3213,7 @@
 </file>
 
 <file path=ppt/slides/slide2.xml><?xml version="1.0" encoding="utf-8"?>
-<p:sld xmlns:a="http://schemas.openxmlformats.org/drawingml/2006/main" xmlns:r="http://schemas.openxmlformats.org/officeDocument/2006/relationships" xmlns:p="http://schemas.openxmlformats.org/presentationml/2006/main">
+<p:sld xmlns:a="http://schemas.openxmlformats.org/drawingml/2006/main" xmlns:p="http://schemas.openxmlformats.org/presentationml/2006/main" xmlns:r="http://schemas.openxmlformats.org/officeDocument/2006/relationships">
   <p:cSld>
     <p:spTree>
       <p:nvGrpSpPr>
@@ -3224,14 +3221,7 @@
         <p:cNvGrpSpPr/>
         <p:nvPr/>
       </p:nvGrpSpPr>
-      <p:grpSpPr>
-        <a:xfrm>
-          <a:off x="0" y="0"/>
-          <a:ext cx="0" cy="0"/>
-          <a:chOff x="0" y="0"/>
-          <a:chExt cx="0" cy="0"/>
-        </a:xfrm>
-      </p:grpSpPr>
+      <p:grpSpPr/>
       <p:sp>
         <p:nvSpPr>
           <p:cNvPr id="2" name="TextBox 1"/>
@@ -3307,7 +3297,6 @@
           <a:lstStyle/>
           <a:p>
             <a:pPr algn="ctr"/>
-            <a:endParaRPr/>
           </a:p>
         </p:txBody>
       </p:sp>
@@ -3367,7 +3356,7 @@
 </file>
 
 <file path=ppt/slides/slide3.xml><?xml version="1.0" encoding="utf-8"?>
-<p:sld xmlns:a="http://schemas.openxmlformats.org/drawingml/2006/main" xmlns:r="http://schemas.openxmlformats.org/officeDocument/2006/relationships" xmlns:p="http://schemas.openxmlformats.org/presentationml/2006/main">
+<p:sld xmlns:a="http://schemas.openxmlformats.org/drawingml/2006/main" xmlns:p="http://schemas.openxmlformats.org/presentationml/2006/main" xmlns:r="http://schemas.openxmlformats.org/officeDocument/2006/relationships">
   <p:cSld>
     <p:spTree>
       <p:nvGrpSpPr>
@@ -3375,14 +3364,7 @@
         <p:cNvGrpSpPr/>
         <p:nvPr/>
       </p:nvGrpSpPr>
-      <p:grpSpPr>
-        <a:xfrm>
-          <a:off x="0" y="0"/>
-          <a:ext cx="0" cy="0"/>
-          <a:chOff x="0" y="0"/>
-          <a:chExt cx="0" cy="0"/>
-        </a:xfrm>
-      </p:grpSpPr>
+      <p:grpSpPr/>
       <p:sp>
         <p:nvSpPr>
           <p:cNvPr id="2" name="TextBox 1"/>
@@ -3458,7 +3440,6 @@
           <a:lstStyle/>
           <a:p>
             <a:pPr algn="ctr"/>
-            <a:endParaRPr/>
           </a:p>
         </p:txBody>
       </p:sp>
@@ -3526,7 +3507,7 @@
 </file>
 
 <file path=ppt/slides/slide4.xml><?xml version="1.0" encoding="utf-8"?>
-<p:sld xmlns:a="http://schemas.openxmlformats.org/drawingml/2006/main" xmlns:r="http://schemas.openxmlformats.org/officeDocument/2006/relationships" xmlns:p="http://schemas.openxmlformats.org/presentationml/2006/main">
+<p:sld xmlns:a="http://schemas.openxmlformats.org/drawingml/2006/main" xmlns:p="http://schemas.openxmlformats.org/presentationml/2006/main" xmlns:r="http://schemas.openxmlformats.org/officeDocument/2006/relationships">
   <p:cSld>
     <p:spTree>
       <p:nvGrpSpPr>
@@ -3534,14 +3515,7 @@
         <p:cNvGrpSpPr/>
         <p:nvPr/>
       </p:nvGrpSpPr>
-      <p:grpSpPr>
-        <a:xfrm>
-          <a:off x="0" y="0"/>
-          <a:ext cx="0" cy="0"/>
-          <a:chOff x="0" y="0"/>
-          <a:chExt cx="0" cy="0"/>
-        </a:xfrm>
-      </p:grpSpPr>
+      <p:grpSpPr/>
       <p:sp>
         <p:nvSpPr>
           <p:cNvPr id="2" name="TextBox 1"/>
@@ -3617,7 +3591,6 @@
           <a:lstStyle/>
           <a:p>
             <a:pPr algn="ctr"/>
-            <a:endParaRPr/>
           </a:p>
         </p:txBody>
       </p:sp>
@@ -3677,7 +3650,7 @@
 </file>
 
 <file path=ppt/slides/slide5.xml><?xml version="1.0" encoding="utf-8"?>
-<p:sld xmlns:a="http://schemas.openxmlformats.org/drawingml/2006/main" xmlns:r="http://schemas.openxmlformats.org/officeDocument/2006/relationships" xmlns:p="http://schemas.openxmlformats.org/presentationml/2006/main">
+<p:sld xmlns:a="http://schemas.openxmlformats.org/drawingml/2006/main" xmlns:p="http://schemas.openxmlformats.org/presentationml/2006/main" xmlns:r="http://schemas.openxmlformats.org/officeDocument/2006/relationships">
   <p:cSld>
     <p:spTree>
       <p:nvGrpSpPr>
@@ -3685,14 +3658,7 @@
         <p:cNvGrpSpPr/>
         <p:nvPr/>
       </p:nvGrpSpPr>
-      <p:grpSpPr>
-        <a:xfrm>
-          <a:off x="0" y="0"/>
-          <a:ext cx="0" cy="0"/>
-          <a:chOff x="0" y="0"/>
-          <a:chExt cx="0" cy="0"/>
-        </a:xfrm>
-      </p:grpSpPr>
+      <p:grpSpPr/>
       <p:sp>
         <p:nvSpPr>
           <p:cNvPr id="2" name="TextBox 1"/>
@@ -3768,7 +3734,6 @@
           <a:lstStyle/>
           <a:p>
             <a:pPr algn="ctr"/>
-            <a:endParaRPr/>
           </a:p>
         </p:txBody>
       </p:sp>
@@ -3828,7 +3793,7 @@
 </file>
 
 <file path=ppt/slides/slide6.xml><?xml version="1.0" encoding="utf-8"?>
-<p:sld xmlns:a="http://schemas.openxmlformats.org/drawingml/2006/main" xmlns:r="http://schemas.openxmlformats.org/officeDocument/2006/relationships" xmlns:p="http://schemas.openxmlformats.org/presentationml/2006/main">
+<p:sld xmlns:a="http://schemas.openxmlformats.org/drawingml/2006/main" xmlns:p="http://schemas.openxmlformats.org/presentationml/2006/main" xmlns:r="http://schemas.openxmlformats.org/officeDocument/2006/relationships">
   <p:cSld>
     <p:spTree>
       <p:nvGrpSpPr>
@@ -3836,14 +3801,7 @@
         <p:cNvGrpSpPr/>
         <p:nvPr/>
       </p:nvGrpSpPr>
-      <p:grpSpPr>
-        <a:xfrm>
-          <a:off x="0" y="0"/>
-          <a:ext cx="0" cy="0"/>
-          <a:chOff x="0" y="0"/>
-          <a:chExt cx="0" cy="0"/>
-        </a:xfrm>
-      </p:grpSpPr>
+      <p:grpSpPr/>
       <p:sp>
         <p:nvSpPr>
           <p:cNvPr id="2" name="TextBox 1"/>
@@ -3919,7 +3877,6 @@
           <a:lstStyle/>
           <a:p>
             <a:pPr algn="ctr"/>
-            <a:endParaRPr/>
           </a:p>
         </p:txBody>
       </p:sp>
@@ -3979,7 +3936,7 @@
 </file>
 
 <file path=ppt/slides/slide7.xml><?xml version="1.0" encoding="utf-8"?>
-<p:sld xmlns:a="http://schemas.openxmlformats.org/drawingml/2006/main" xmlns:r="http://schemas.openxmlformats.org/officeDocument/2006/relationships" xmlns:p="http://schemas.openxmlformats.org/presentationml/2006/main">
+<p:sld xmlns:a="http://schemas.openxmlformats.org/drawingml/2006/main" xmlns:p="http://schemas.openxmlformats.org/presentationml/2006/main" xmlns:r="http://schemas.openxmlformats.org/officeDocument/2006/relationships">
   <p:cSld>
     <p:spTree>
       <p:nvGrpSpPr>
@@ -3987,14 +3944,7 @@
         <p:cNvGrpSpPr/>
         <p:nvPr/>
       </p:nvGrpSpPr>
-      <p:grpSpPr>
-        <a:xfrm>
-          <a:off x="0" y="0"/>
-          <a:ext cx="0" cy="0"/>
-          <a:chOff x="0" y="0"/>
-          <a:chExt cx="0" cy="0"/>
-        </a:xfrm>
-      </p:grpSpPr>
+      <p:grpSpPr/>
       <p:sp>
         <p:nvSpPr>
           <p:cNvPr id="2" name="TextBox 1"/>
@@ -4070,7 +4020,6 @@
           <a:lstStyle/>
           <a:p>
             <a:pPr algn="ctr"/>
-            <a:endParaRPr/>
           </a:p>
         </p:txBody>
       </p:sp>
